--- a/Presentations/Thesis Update- 04-03-2026.pptx
+++ b/Presentations/Thesis Update- 04-03-2026.pptx
@@ -228,7 +228,7 @@
           <a:p>
             <a:fld id="{B11A94B5-C042-41C2-9501-1FF964BA33BC}" type="datetimeFigureOut">
               <a:rPr lang="de-DE" smtClean="0"/>
-              <a:t>30.03.2026</a:t>
+              <a:t>29.04.2026</a:t>
             </a:fld>
             <a:endParaRPr lang="de-DE"/>
           </a:p>
